--- a/slides/pptx/week02.pptx
+++ b/slides/pptx/week02.pptx
@@ -609,7 +609,8 @@
           <a:p>
             <a:r>
               <a:rPr lang="en-US" dirty="0"/>
-              <a:t>The static companion to the fuzz-verdict sim, and the answer to 'why fuzz if we already ran SAST?' Walk it: SAST can't know the input will ever be exactly FUZ, so it stays silent (blue); the fuzzer doesn't brute-force randomly — coverage feedback rewards each new gate passed, so it climbs to FUZ and the unguarded data[3] read faults under ASan (orange). Land on: static reads, fuzzing runs — complements. ~4 min.</a:t>
+              <a:t>The static companion to the fuzz-verdict sim, and the answer to 'why fuzz if we already ran SAST?' Walk it: SAST can't know the input will ever be exactly FUZ, so it stays silent (blue); the fuzzer doesn't brute-force randomly — coverage feedback rewards each new gate passed, so it climbs to FUZ and the unguarded data[3] read faults under ASan (orange). Land on: static reads, fuzzing runs — complements. ~4 min.
+Diagram: A coverage-guided fuzzer reaches a bug a static analyzer misses: the harness has four nested byte checks (F, U, Z, Z) and the fourth reads data[3] with no size&gt;3 guard, so the input 'FUZ' reads one byte out of bounds. SAST reads the code and stays silent; the fuzzer mutates inputs and is rewarded for each new branch reached, climbing random -&gt; F -&gt; FU -&gt; FUZ until the unguarded read crashes under AddressSanitizer, which writes a reproducer file. SAST and fuzzing are complements, not substitutes.</a:t>
             </a:r>
             <a:endParaRPr lang="en-US" dirty="0"/>
           </a:p>
@@ -1841,7 +1842,8 @@
           <a:p>
             <a:r>
               <a:rPr lang="en-US" dirty="0"/>
-              <a:t>The mental map for the whole unit. Stress: no single tool finds everything — they see different things. Every READS/FINDS/BLIND-TO on this diagram is real output from this week's own vulnerable-repo, not a hypothetical — walk it left to right and land on "complements, not substitutes." Tie each to a later week (SCA → W12, DAST → Burp in W4-6). ~5 min.</a:t>
+              <a:t>The mental map for the whole unit. Stress: no single tool finds everything — they see different things. Every READS/FINDS/BLIND-TO on this diagram is real output from this week's own vulnerable-repo, not a hypothetical — walk it left to right and land on "complements, not substitutes." Tie each to a later week (SCA → W12, DAST → Burp in W4-6). ~5 min.
+Diagram: A left-to-right software development pipeline with five stages: write code, commit, build, deploy, run. Four scanners are placed at the stage each one actually operates on, and under each is written what it cannot see, grounded in the actual CWEs found in this week's vulnerable-repo/app.py and harness.c.</a:t>
             </a:r>
             <a:endParaRPr lang="en-US" dirty="0"/>
           </a:p>
@@ -2568,7 +2570,7 @@
       </p:grpSpPr>
       <p:pic>
         <p:nvPicPr>
-          <p:cNvPr id="2" name="Image 0" descr="/Users/pop7/Library/CloudStorage/OneDrive-MonsterConnectCo.,Ltd/Lecture/KOSEN69 - software-security/slides/pptx/assets/logo-small.png">    </p:cNvPr>
+          <p:cNvPr id="2" name="Image 0" descr="/private/tmp/claude-501/-Users-pop7-Library-CloudStorage-OneDrive-MonsterConnectCo--Ltd-Lecture-KOSEN69---software-security/e6d6556f-17de-403d-a9a0-cf2f846149b4/scratchpad/tree/slides/pptx/assets/logo-small.png">    </p:cNvPr>
           <p:cNvPicPr>
             <a:picLocks noChangeAspect="1"/>
           </p:cNvPicPr>
@@ -2832,16 +2834,40 @@
           </a:p>
         </p:txBody>
       </p:sp>
-      <p:sp>
-        <p:nvSpPr>
-          <p:cNvPr id="5" name="Text 2"/>
-          <p:cNvSpPr/>
-          <p:nvPr/>
-        </p:nvSpPr>
-        <p:spPr>
-          <a:xfrm>
-            <a:off x="548640" y="1325880"/>
-            <a:ext cx="8046720" cy="2194560"/>
+      <p:pic>
+        <p:nvPicPr>
+          <p:cNvPr id="5" name="Image 1" descr="A coverage-guided fuzzer reaches a bug a static analyzer misses: the harness has four nested byte checks (F, U, Z, Z) and the fourth reads data[3] with no size&gt;3 guard, so the input 'FUZ' reads one byte out of bounds. SAST reads the code and stays silent; the fuzzer mutates inputs and is rewarded for each new branch reached, climbing random -&gt; F -&gt; FU -&gt; FUZ until the unguarded read crashes under AddressSanitizer, which writes a reproducer file. SAST and fuzzing are complements, not substitutes.">    </p:cNvPr>
+          <p:cNvPicPr>
+            <a:picLocks noChangeAspect="1"/>
+          </p:cNvPicPr>
+          <p:nvPr/>
+        </p:nvPicPr>
+        <p:blipFill>
+          <a:blip r:embed="rId2"/>
+          <a:stretch>
+            <a:fillRect/>
+          </a:stretch>
+        </p:blipFill>
+        <p:spPr>
+          <a:xfrm>
+            <a:off x="1687341" y="1097280"/>
+            <a:ext cx="5769319" cy="3566160"/>
+          </a:xfrm>
+          <a:prstGeom prst="rect">
+            <a:avLst/>
+          </a:prstGeom>
+        </p:spPr>
+      </p:pic>
+      <p:sp>
+        <p:nvSpPr>
+          <p:cNvPr id="6" name="Text 2"/>
+          <p:cNvSpPr/>
+          <p:nvPr/>
+        </p:nvSpPr>
+        <p:spPr>
+          <a:xfrm>
+            <a:off x="457200" y="4800600"/>
+            <a:ext cx="6949440" cy="274320"/>
           </a:xfrm>
           <a:prstGeom prst="rect">
             <a:avLst/>
@@ -2850,62 +2876,21 @@
           <a:ln/>
         </p:spPr>
         <p:txBody>
-          <a:bodyPr wrap="square" lIns="0" tIns="0" rIns="0" bIns="0" rtlCol="0" anchor="t">
-            <a:normAutofit/>
-          </a:bodyPr>
+          <a:bodyPr wrap="square" lIns="0" tIns="0" rIns="0" bIns="0" rtlCol="0" anchor="ctr"/>
           <a:lstStyle/>
           <a:p>
             <a:pPr indent="0" marL="0">
               <a:buNone/>
             </a:pPr>
             <a:r>
-              <a:rPr lang="en-US" sz="1400" dirty="0">
-                <a:solidFill>
-                  <a:srgbClr val="1F2937"/>
+              <a:rPr lang="en-US" sz="900" dirty="0">
+                <a:solidFill>
+                  <a:srgbClr val="64748B"/>
                 </a:solidFill>
                 <a:latin typeface="Calibri" pitchFamily="34" charset="0"/>
                 <a:ea typeface="Calibri" pitchFamily="34" charset="-122"/>
                 <a:cs typeface="Calibri" pitchFamily="34" charset="-120"/>
               </a:rPr>
-              <a:t>See diagram: A coverage-guided fuzzer reaches a bug a static analyzer misses: the harness has four nested byte checks (F, U, Z, Z) and the fourth reads data[3] with no size&gt;3 guard, so the input 'FUZ' reads one byte out of bounds. SAST reads the code and stays silent; the fuzzer mutates inputs and is rewarded for each new branch reached, climbing random -&gt; F -&gt; FU -&gt; FUZ until the unguarded read crashes under AddressSanitizer, which writes a reproducer file. SAST and fuzzing are complements, not substitutes. (web only)</a:t>
-            </a:r>
-            <a:endParaRPr lang="en-US" sz="1400" dirty="0"/>
-          </a:p>
-        </p:txBody>
-      </p:sp>
-      <p:sp>
-        <p:nvSpPr>
-          <p:cNvPr id="6" name="Text 3"/>
-          <p:cNvSpPr/>
-          <p:nvPr/>
-        </p:nvSpPr>
-        <p:spPr>
-          <a:xfrm>
-            <a:off x="457200" y="4800600"/>
-            <a:ext cx="6949440" cy="274320"/>
-          </a:xfrm>
-          <a:prstGeom prst="rect">
-            <a:avLst/>
-          </a:prstGeom>
-          <a:noFill/>
-          <a:ln/>
-        </p:spPr>
-        <p:txBody>
-          <a:bodyPr wrap="square" lIns="0" tIns="0" rIns="0" bIns="0" rtlCol="0" anchor="ctr"/>
-          <a:lstStyle/>
-          <a:p>
-            <a:pPr indent="0" marL="0">
-              <a:buNone/>
-            </a:pPr>
-            <a:r>
-              <a:rPr lang="en-US" sz="900" dirty="0">
-                <a:solidFill>
-                  <a:srgbClr val="64748B"/>
-                </a:solidFill>
-                <a:latin typeface="Calibri" pitchFamily="34" charset="0"/>
-                <a:ea typeface="Calibri" pitchFamily="34" charset="-122"/>
-                <a:cs typeface="Calibri" pitchFamily="34" charset="-120"/>
-              </a:rPr>
               <a:t>Software Security · Week 2</a:t>
             </a:r>
             <a:endParaRPr lang="en-US" sz="900" dirty="0"/>
@@ -2914,14 +2899,14 @@
       </p:sp>
       <p:pic>
         <p:nvPicPr>
-          <p:cNvPr id="7" name="Image 1" descr="/Users/pop7/Library/CloudStorage/OneDrive-MonsterConnectCo.,Ltd/Lecture/KOSEN69 - software-security/slides/pptx/assets/logo-small.png">    </p:cNvPr>
+          <p:cNvPr id="7" name="Image 2" descr="/private/tmp/claude-501/-Users-pop7-Library-CloudStorage-OneDrive-MonsterConnectCo--Ltd-Lecture-KOSEN69---software-security/e6d6556f-17de-403d-a9a0-cf2f846149b4/scratchpad/tree/slides/pptx/assets/logo-small.png">    </p:cNvPr>
           <p:cNvPicPr>
             <a:picLocks noChangeAspect="1"/>
           </p:cNvPicPr>
           <p:nvPr/>
         </p:nvPicPr>
         <p:blipFill>
-          <a:blip r:embed="rId2"/>
+          <a:blip r:embed="rId3"/>
           <a:stretch>
             <a:fillRect/>
           </a:stretch>
@@ -3157,7 +3142,7 @@
       </p:sp>
       <p:pic>
         <p:nvPicPr>
-          <p:cNvPr id="7" name="Image 1" descr="/Users/pop7/Library/CloudStorage/OneDrive-MonsterConnectCo.,Ltd/Lecture/KOSEN69 - software-security/slides/pptx/assets/logo-small.png">    </p:cNvPr>
+          <p:cNvPr id="7" name="Image 1" descr="/private/tmp/claude-501/-Users-pop7-Library-CloudStorage-OneDrive-MonsterConnectCo--Ltd-Lecture-KOSEN69---software-security/e6d6556f-17de-403d-a9a0-cf2f846149b4/scratchpad/tree/slides/pptx/assets/logo-small.png">    </p:cNvPr>
           <p:cNvPicPr>
             <a:picLocks noChangeAspect="1"/>
           </p:cNvPicPr>
@@ -3479,7 +3464,7 @@
       </p:sp>
       <p:pic>
         <p:nvPicPr>
-          <p:cNvPr id="8" name="Image 1" descr="/Users/pop7/Library/CloudStorage/OneDrive-MonsterConnectCo.,Ltd/Lecture/KOSEN69 - software-security/slides/pptx/assets/logo-small.png">    </p:cNvPr>
+          <p:cNvPr id="8" name="Image 1" descr="/private/tmp/claude-501/-Users-pop7-Library-CloudStorage-OneDrive-MonsterConnectCo--Ltd-Lecture-KOSEN69---software-security/e6d6556f-17de-403d-a9a0-cf2f846149b4/scratchpad/tree/slides/pptx/assets/logo-small.png">    </p:cNvPr>
           <p:cNvPicPr>
             <a:picLocks noChangeAspect="1"/>
           </p:cNvPicPr>
@@ -3722,7 +3707,7 @@
       </p:sp>
       <p:pic>
         <p:nvPicPr>
-          <p:cNvPr id="7" name="Image 1" descr="/Users/pop7/Library/CloudStorage/OneDrive-MonsterConnectCo.,Ltd/Lecture/KOSEN69 - software-security/slides/pptx/assets/logo-small.png">    </p:cNvPr>
+          <p:cNvPr id="7" name="Image 1" descr="/private/tmp/claude-501/-Users-pop7-Library-CloudStorage-OneDrive-MonsterConnectCo--Ltd-Lecture-KOSEN69---software-security/e6d6556f-17de-403d-a9a0-cf2f846149b4/scratchpad/tree/slides/pptx/assets/logo-small.png">    </p:cNvPr>
           <p:cNvPicPr>
             <a:picLocks noChangeAspect="1"/>
           </p:cNvPicPr>
@@ -4023,7 +4008,7 @@
       </p:sp>
       <p:pic>
         <p:nvPicPr>
-          <p:cNvPr id="8" name="Image 1" descr="/Users/pop7/Library/CloudStorage/OneDrive-MonsterConnectCo.,Ltd/Lecture/KOSEN69 - software-security/slides/pptx/assets/logo-small.png">    </p:cNvPr>
+          <p:cNvPr id="8" name="Image 1" descr="/private/tmp/claude-501/-Users-pop7-Library-CloudStorage-OneDrive-MonsterConnectCo--Ltd-Lecture-KOSEN69---software-security/e6d6556f-17de-403d-a9a0-cf2f846149b4/scratchpad/tree/slides/pptx/assets/logo-small.png">    </p:cNvPr>
           <p:cNvPicPr>
             <a:picLocks noChangeAspect="1"/>
           </p:cNvPicPr>
@@ -4422,7 +4407,7 @@
       </p:sp>
       <p:pic>
         <p:nvPicPr>
-          <p:cNvPr id="10" name="Image 1" descr="/Users/pop7/Library/CloudStorage/OneDrive-MonsterConnectCo.,Ltd/Lecture/KOSEN69 - software-security/slides/pptx/assets/logo-small.png">    </p:cNvPr>
+          <p:cNvPr id="10" name="Image 1" descr="/private/tmp/claude-501/-Users-pop7-Library-CloudStorage-OneDrive-MonsterConnectCo--Ltd-Lecture-KOSEN69---software-security/e6d6556f-17de-403d-a9a0-cf2f846149b4/scratchpad/tree/slides/pptx/assets/logo-small.png">    </p:cNvPr>
           <p:cNvPicPr>
             <a:picLocks noChangeAspect="1"/>
           </p:cNvPicPr>
@@ -4723,7 +4708,7 @@
       </p:sp>
       <p:pic>
         <p:nvPicPr>
-          <p:cNvPr id="8" name="Image 1" descr="/Users/pop7/Library/CloudStorage/OneDrive-MonsterConnectCo.,Ltd/Lecture/KOSEN69 - software-security/slides/pptx/assets/logo-small.png">    </p:cNvPr>
+          <p:cNvPr id="8" name="Image 1" descr="/private/tmp/claude-501/-Users-pop7-Library-CloudStorage-OneDrive-MonsterConnectCo--Ltd-Lecture-KOSEN69---software-security/e6d6556f-17de-403d-a9a0-cf2f846149b4/scratchpad/tree/slides/pptx/assets/logo-small.png">    </p:cNvPr>
           <p:cNvPicPr>
             <a:picLocks noChangeAspect="1"/>
           </p:cNvPicPr>
@@ -5129,7 +5114,7 @@
       </p:sp>
       <p:pic>
         <p:nvPicPr>
-          <p:cNvPr id="10" name="Image 1" descr="/Users/pop7/Library/CloudStorage/OneDrive-MonsterConnectCo.,Ltd/Lecture/KOSEN69 - software-security/slides/pptx/assets/logo-small.png">    </p:cNvPr>
+          <p:cNvPr id="10" name="Image 1" descr="/private/tmp/claude-501/-Users-pop7-Library-CloudStorage-OneDrive-MonsterConnectCo--Ltd-Lecture-KOSEN69---software-security/e6d6556f-17de-403d-a9a0-cf2f846149b4/scratchpad/tree/slides/pptx/assets/logo-small.png">    </p:cNvPr>
           <p:cNvPicPr>
             <a:picLocks noChangeAspect="1"/>
           </p:cNvPicPr>
@@ -5409,7 +5394,7 @@
       </p:sp>
       <p:pic>
         <p:nvPicPr>
-          <p:cNvPr id="8" name="Image 1" descr="/Users/pop7/Library/CloudStorage/OneDrive-MonsterConnectCo.,Ltd/Lecture/KOSEN69 - software-security/slides/pptx/assets/logo-small.png">    </p:cNvPr>
+          <p:cNvPr id="8" name="Image 1" descr="/private/tmp/claude-501/-Users-pop7-Library-CloudStorage-OneDrive-MonsterConnectCo--Ltd-Lecture-KOSEN69---software-security/e6d6556f-17de-403d-a9a0-cf2f846149b4/scratchpad/tree/slides/pptx/assets/logo-small.png">    </p:cNvPr>
           <p:cNvPicPr>
             <a:picLocks noChangeAspect="1"/>
           </p:cNvPicPr>
@@ -5710,7 +5695,7 @@
       </p:sp>
       <p:pic>
         <p:nvPicPr>
-          <p:cNvPr id="8" name="Image 1" descr="/Users/pop7/Library/CloudStorage/OneDrive-MonsterConnectCo.,Ltd/Lecture/KOSEN69 - software-security/slides/pptx/assets/logo-small.png">    </p:cNvPr>
+          <p:cNvPr id="8" name="Image 1" descr="/private/tmp/claude-501/-Users-pop7-Library-CloudStorage-OneDrive-MonsterConnectCo--Ltd-Lecture-KOSEN69---software-security/e6d6556f-17de-403d-a9a0-cf2f846149b4/scratchpad/tree/slides/pptx/assets/logo-small.png">    </p:cNvPr>
           <p:cNvPicPr>
             <a:picLocks noChangeAspect="1"/>
           </p:cNvPicPr>
@@ -6032,7 +6017,7 @@
       </p:sp>
       <p:pic>
         <p:nvPicPr>
-          <p:cNvPr id="8" name="Image 1" descr="/Users/pop7/Library/CloudStorage/OneDrive-MonsterConnectCo.,Ltd/Lecture/KOSEN69 - software-security/slides/pptx/assets/logo-small.png">    </p:cNvPr>
+          <p:cNvPr id="8" name="Image 1" descr="/private/tmp/claude-501/-Users-pop7-Library-CloudStorage-OneDrive-MonsterConnectCo--Ltd-Lecture-KOSEN69---software-security/e6d6556f-17de-403d-a9a0-cf2f846149b4/scratchpad/tree/slides/pptx/assets/logo-small.png">    </p:cNvPr>
           <p:cNvPicPr>
             <a:picLocks noChangeAspect="1"/>
           </p:cNvPicPr>
@@ -6166,7 +6151,7 @@
       </p:sp>
       <p:pic>
         <p:nvPicPr>
-          <p:cNvPr id="4" name="Image 0" descr="/Users/pop7/Library/CloudStorage/OneDrive-MonsterConnectCo.,Ltd/Lecture/KOSEN69 - software-security/slides/pptx/assets/logo-small.png">    </p:cNvPr>
+          <p:cNvPr id="4" name="Image 0" descr="/private/tmp/claude-501/-Users-pop7-Library-CloudStorage-OneDrive-MonsterConnectCo--Ltd-Lecture-KOSEN69---software-security/e6d6556f-17de-403d-a9a0-cf2f846149b4/scratchpad/tree/slides/pptx/assets/logo-small.png">    </p:cNvPr>
           <p:cNvPicPr>
             <a:picLocks noChangeAspect="1"/>
           </p:cNvPicPr>
@@ -6467,7 +6452,7 @@
       </p:sp>
       <p:pic>
         <p:nvPicPr>
-          <p:cNvPr id="8" name="Image 1" descr="/Users/pop7/Library/CloudStorage/OneDrive-MonsterConnectCo.,Ltd/Lecture/KOSEN69 - software-security/slides/pptx/assets/logo-small.png">    </p:cNvPr>
+          <p:cNvPr id="8" name="Image 1" descr="/private/tmp/claude-501/-Users-pop7-Library-CloudStorage-OneDrive-MonsterConnectCo--Ltd-Lecture-KOSEN69---software-security/e6d6556f-17de-403d-a9a0-cf2f846149b4/scratchpad/tree/slides/pptx/assets/logo-small.png">    </p:cNvPr>
           <p:cNvPicPr>
             <a:picLocks noChangeAspect="1"/>
           </p:cNvPicPr>
@@ -6809,7 +6794,7 @@
       </p:sp>
       <p:pic>
         <p:nvPicPr>
-          <p:cNvPr id="9" name="Image 1" descr="/Users/pop7/Library/CloudStorage/OneDrive-MonsterConnectCo.,Ltd/Lecture/KOSEN69 - software-security/slides/pptx/assets/logo-small.png">    </p:cNvPr>
+          <p:cNvPr id="9" name="Image 1" descr="/private/tmp/claude-501/-Users-pop7-Library-CloudStorage-OneDrive-MonsterConnectCo--Ltd-Lecture-KOSEN69---software-security/e6d6556f-17de-403d-a9a0-cf2f846149b4/scratchpad/tree/slides/pptx/assets/logo-small.png">    </p:cNvPr>
           <p:cNvPicPr>
             <a:picLocks noChangeAspect="1"/>
           </p:cNvPicPr>
@@ -6953,16 +6938,40 @@
           </a:p>
         </p:txBody>
       </p:sp>
-      <p:sp>
-        <p:nvSpPr>
-          <p:cNvPr id="5" name="Text 2"/>
-          <p:cNvSpPr/>
-          <p:nvPr/>
-        </p:nvSpPr>
-        <p:spPr>
-          <a:xfrm>
-            <a:off x="548640" y="1325880"/>
-            <a:ext cx="8046720" cy="1371600"/>
+      <p:pic>
+        <p:nvPicPr>
+          <p:cNvPr id="5" name="Image 1" descr="A left-to-right software development pipeline with five stages: write code, commit, build, deploy, run. Four scanners are placed at the stage each one actually operates on, and under each is written what it cannot see, grounded in the actual CWEs found in this week's vulnerable-repo/app.py and harness.c.">    </p:cNvPr>
+          <p:cNvPicPr>
+            <a:picLocks noChangeAspect="1"/>
+          </p:cNvPicPr>
+          <p:nvPr/>
+        </p:nvPicPr>
+        <p:blipFill>
+          <a:blip r:embed="rId2"/>
+          <a:stretch>
+            <a:fillRect/>
+          </a:stretch>
+        </p:blipFill>
+        <p:spPr>
+          <a:xfrm>
+            <a:off x="1666778" y="1097280"/>
+            <a:ext cx="5810444" cy="3566160"/>
+          </a:xfrm>
+          <a:prstGeom prst="rect">
+            <a:avLst/>
+          </a:prstGeom>
+        </p:spPr>
+      </p:pic>
+      <p:sp>
+        <p:nvSpPr>
+          <p:cNvPr id="6" name="Text 2"/>
+          <p:cNvSpPr/>
+          <p:nvPr/>
+        </p:nvSpPr>
+        <p:spPr>
+          <a:xfrm>
+            <a:off x="457200" y="4800600"/>
+            <a:ext cx="6949440" cy="274320"/>
           </a:xfrm>
           <a:prstGeom prst="rect">
             <a:avLst/>
@@ -6971,62 +6980,21 @@
           <a:ln/>
         </p:spPr>
         <p:txBody>
-          <a:bodyPr wrap="square" lIns="0" tIns="0" rIns="0" bIns="0" rtlCol="0" anchor="t">
-            <a:normAutofit/>
-          </a:bodyPr>
+          <a:bodyPr wrap="square" lIns="0" tIns="0" rIns="0" bIns="0" rtlCol="0" anchor="ctr"/>
           <a:lstStyle/>
           <a:p>
             <a:pPr indent="0" marL="0">
               <a:buNone/>
             </a:pPr>
             <a:r>
-              <a:rPr lang="en-US" sz="1400" dirty="0">
-                <a:solidFill>
-                  <a:srgbClr val="1F2937"/>
+              <a:rPr lang="en-US" sz="900" dirty="0">
+                <a:solidFill>
+                  <a:srgbClr val="64748B"/>
                 </a:solidFill>
                 <a:latin typeface="Calibri" pitchFamily="34" charset="0"/>
                 <a:ea typeface="Calibri" pitchFamily="34" charset="-122"/>
                 <a:cs typeface="Calibri" pitchFamily="34" charset="-120"/>
               </a:rPr>
-              <a:t>See diagram: A left-to-right software development pipeline with five stages: write code, commit, build, deploy, run. Four scanners are placed at the stage each one actually operates on, and under each is written what it cannot see, grounded in the actual CWEs found in this week's vulnerable-repo/app.py and harness.c. (web only)</a:t>
-            </a:r>
-            <a:endParaRPr lang="en-US" sz="1400" dirty="0"/>
-          </a:p>
-        </p:txBody>
-      </p:sp>
-      <p:sp>
-        <p:nvSpPr>
-          <p:cNvPr id="6" name="Text 3"/>
-          <p:cNvSpPr/>
-          <p:nvPr/>
-        </p:nvSpPr>
-        <p:spPr>
-          <a:xfrm>
-            <a:off x="457200" y="4800600"/>
-            <a:ext cx="6949440" cy="274320"/>
-          </a:xfrm>
-          <a:prstGeom prst="rect">
-            <a:avLst/>
-          </a:prstGeom>
-          <a:noFill/>
-          <a:ln/>
-        </p:spPr>
-        <p:txBody>
-          <a:bodyPr wrap="square" lIns="0" tIns="0" rIns="0" bIns="0" rtlCol="0" anchor="ctr"/>
-          <a:lstStyle/>
-          <a:p>
-            <a:pPr indent="0" marL="0">
-              <a:buNone/>
-            </a:pPr>
-            <a:r>
-              <a:rPr lang="en-US" sz="900" dirty="0">
-                <a:solidFill>
-                  <a:srgbClr val="64748B"/>
-                </a:solidFill>
-                <a:latin typeface="Calibri" pitchFamily="34" charset="0"/>
-                <a:ea typeface="Calibri" pitchFamily="34" charset="-122"/>
-                <a:cs typeface="Calibri" pitchFamily="34" charset="-120"/>
-              </a:rPr>
               <a:t>Software Security · Week 2</a:t>
             </a:r>
             <a:endParaRPr lang="en-US" sz="900" dirty="0"/>
@@ -7035,14 +7003,14 @@
       </p:sp>
       <p:pic>
         <p:nvPicPr>
-          <p:cNvPr id="7" name="Image 1" descr="/Users/pop7/Library/CloudStorage/OneDrive-MonsterConnectCo.,Ltd/Lecture/KOSEN69 - software-security/slides/pptx/assets/logo-small.png">    </p:cNvPr>
+          <p:cNvPr id="7" name="Image 2" descr="/private/tmp/claude-501/-Users-pop7-Library-CloudStorage-OneDrive-MonsterConnectCo--Ltd-Lecture-KOSEN69---software-security/e6d6556f-17de-403d-a9a0-cf2f846149b4/scratchpad/tree/slides/pptx/assets/logo-small.png">    </p:cNvPr>
           <p:cNvPicPr>
             <a:picLocks noChangeAspect="1"/>
           </p:cNvPicPr>
           <p:nvPr/>
         </p:nvPicPr>
         <p:blipFill>
-          <a:blip r:embed="rId2"/>
+          <a:blip r:embed="rId3"/>
           <a:stretch>
             <a:fillRect/>
           </a:stretch>
@@ -7378,7 +7346,7 @@
       </p:sp>
       <p:pic>
         <p:nvPicPr>
-          <p:cNvPr id="10" name="Image 1" descr="/Users/pop7/Library/CloudStorage/OneDrive-MonsterConnectCo.,Ltd/Lecture/KOSEN69 - software-security/slides/pptx/assets/logo-small.png">    </p:cNvPr>
+          <p:cNvPr id="10" name="Image 1" descr="/private/tmp/claude-501/-Users-pop7-Library-CloudStorage-OneDrive-MonsterConnectCo--Ltd-Lecture-KOSEN69---software-security/e6d6556f-17de-403d-a9a0-cf2f846149b4/scratchpad/tree/slides/pptx/assets/logo-small.png">    </p:cNvPr>
           <p:cNvPicPr>
             <a:picLocks noChangeAspect="1"/>
           </p:cNvPicPr>
@@ -7811,7 +7779,7 @@
       </p:sp>
       <p:pic>
         <p:nvPicPr>
-          <p:cNvPr id="10" name="Image 1" descr="/Users/pop7/Library/CloudStorage/OneDrive-MonsterConnectCo.,Ltd/Lecture/KOSEN69 - software-security/slides/pptx/assets/logo-small.png">    </p:cNvPr>
+          <p:cNvPr id="10" name="Image 1" descr="/private/tmp/claude-501/-Users-pop7-Library-CloudStorage-OneDrive-MonsterConnectCo--Ltd-Lecture-KOSEN69---software-security/e6d6556f-17de-403d-a9a0-cf2f846149b4/scratchpad/tree/slides/pptx/assets/logo-small.png">    </p:cNvPr>
           <p:cNvPicPr>
             <a:picLocks noChangeAspect="1"/>
           </p:cNvPicPr>
@@ -8091,7 +8059,7 @@
       </p:sp>
       <p:pic>
         <p:nvPicPr>
-          <p:cNvPr id="8" name="Image 1" descr="/Users/pop7/Library/CloudStorage/OneDrive-MonsterConnectCo.,Ltd/Lecture/KOSEN69 - software-security/slides/pptx/assets/logo-small.png">    </p:cNvPr>
+          <p:cNvPr id="8" name="Image 1" descr="/private/tmp/claude-501/-Users-pop7-Library-CloudStorage-OneDrive-MonsterConnectCo--Ltd-Lecture-KOSEN69---software-security/e6d6556f-17de-403d-a9a0-cf2f846149b4/scratchpad/tree/slides/pptx/assets/logo-small.png">    </p:cNvPr>
           <p:cNvPicPr>
             <a:picLocks noChangeAspect="1"/>
           </p:cNvPicPr>
@@ -8494,7 +8462,7 @@
       </p:sp>
       <p:pic>
         <p:nvPicPr>
-          <p:cNvPr id="10" name="Image 1" descr="/Users/pop7/Library/CloudStorage/OneDrive-MonsterConnectCo.,Ltd/Lecture/KOSEN69 - software-security/slides/pptx/assets/logo-small.png">    </p:cNvPr>
+          <p:cNvPr id="10" name="Image 1" descr="/private/tmp/claude-501/-Users-pop7-Library-CloudStorage-OneDrive-MonsterConnectCo--Ltd-Lecture-KOSEN69---software-security/e6d6556f-17de-403d-a9a0-cf2f846149b4/scratchpad/tree/slides/pptx/assets/logo-small.png">    </p:cNvPr>
           <p:cNvPicPr>
             <a:picLocks noChangeAspect="1"/>
           </p:cNvPicPr>
